--- a/SIH2026_FINAL.pptx
+++ b/SIH2026_FINAL.pptx
@@ -6408,7 +6408,7 @@
                 <a:latin typeface="Times New Roman" panose="02020603050405020304" pitchFamily="18" charset="0"/>
                 <a:cs typeface="Times New Roman" panose="02020603050405020304" pitchFamily="18" charset="0"/>
               </a:rPr>
-              <a:t>Evidence-based pricing</a:t>
+              <a:t>Evidence-based pricingMaterials + labour + market bands + signals read from the photo and description — every factor shown.</a:t>
             </a:r>
             <a:br>
               <a:rPr lang="en-US" sz="1200" b="1" dirty="0">
@@ -6427,7 +6427,7 @@
                 <a:latin typeface="Times New Roman" panose="02020603050405020304" pitchFamily="18" charset="0"/>
                 <a:cs typeface="Times New Roman" panose="02020603050405020304" pitchFamily="18" charset="0"/>
               </a:rPr>
-              <a:t>Materials + labour + market bands, shown to the artisan.</a:t>
+              <a:t/>
             </a:r>
           </a:p>
           <a:p>
@@ -6443,7 +6443,7 @@
                 <a:latin typeface="Times New Roman" panose="02020603050405020304" pitchFamily="18" charset="0"/>
                 <a:cs typeface="Times New Roman" panose="02020603050405020304" pitchFamily="18" charset="0"/>
               </a:rPr>
-              <a:t>Buyer &amp; market matching</a:t>
+              <a:t>Buyer &amp; market matchingONDC/GeM-ready listing fields; bulk enquiries from B2B and government buyers, answered in-app.</a:t>
             </a:r>
             <a:br>
               <a:rPr lang="en-US" sz="1200" b="1" dirty="0">
@@ -6462,7 +6462,7 @@
                 <a:latin typeface="Times New Roman" panose="02020603050405020304" pitchFamily="18" charset="0"/>
                 <a:cs typeface="Times New Roman" panose="02020603050405020304" pitchFamily="18" charset="0"/>
               </a:rPr>
-              <a:t>ONDC-ready listings; feeds MoSJE’s Bharat-TULIP.</a:t>
+              <a:t/>
             </a:r>
           </a:p>
           <a:p>
@@ -6623,7 +6623,7 @@
                 <a:latin typeface="Times New Roman" panose="02020603050405020304" pitchFamily="18" charset="0"/>
                 <a:cs typeface="Times New Roman" panose="02020603050405020304" pitchFamily="18" charset="0"/>
               </a:rPr>
-              <a:t>No pricing knowledge</a:t>
+              <a:t>No pricing knowledge — ML reads the photo and the description alongside materials, labour and market trends, and shows every reason.</a:t>
             </a:r>
             <a:r>
               <a:rPr lang="en-US" sz="1200" b="0" dirty="0">
@@ -6633,7 +6633,7 @@
                 <a:latin typeface="Times New Roman" panose="02020603050405020304" pitchFamily="18" charset="0"/>
                 <a:cs typeface="Times New Roman" panose="02020603050405020304" pitchFamily="18" charset="0"/>
               </a:rPr>
-              <a:t> — ML suggests a competitive price from materials, labour and market trends, with reasons.</a:t>
+              <a:t/>
             </a:r>
           </a:p>
           <a:p>
@@ -6675,7 +6675,7 @@
                 <a:latin typeface="Times New Roman" panose="02020603050405020304" pitchFamily="18" charset="0"/>
                 <a:cs typeface="Times New Roman" panose="02020603050405020304" pitchFamily="18" charset="0"/>
               </a:rPr>
-              <a:t>Middlemen take the margin</a:t>
+              <a:t>Middlemen take the margin — buyers raise bulk enquiries and the artisan quotes back directly, in their own language.</a:t>
             </a:r>
             <a:r>
               <a:rPr lang="en-US" sz="1200" b="0" dirty="0">
@@ -6685,7 +6685,7 @@
                 <a:latin typeface="Times New Roman" panose="02020603050405020304" pitchFamily="18" charset="0"/>
                 <a:cs typeface="Times New Roman" panose="02020603050405020304" pitchFamily="18" charset="0"/>
               </a:rPr>
-              <a:t> — direct artisan-to-buyer linkage through ONDC and Bharat-TULIP.</a:t>
+              <a:t/>
             </a:r>
           </a:p>
           <a:p>
@@ -6801,7 +6801,7 @@
                 <a:latin typeface="Times New Roman" panose="02020603050405020304" pitchFamily="18" charset="0"/>
                 <a:cs typeface="Times New Roman" panose="02020603050405020304" pitchFamily="18" charset="0"/>
               </a:rPr>
-              <a:t>Evidence-based pricing, not a black box</a:t>
+              <a:t>Evidence-based pricing, not a black box — the artisan sees each factor, including what the photo added, and can override it.</a:t>
             </a:r>
             <a:r>
               <a:rPr lang="en-US" sz="1200" b="0" dirty="0">
@@ -6811,7 +6811,7 @@
                 <a:latin typeface="Times New Roman" panose="02020603050405020304" pitchFamily="18" charset="0"/>
                 <a:cs typeface="Times New Roman" panose="02020603050405020304" pitchFamily="18" charset="0"/>
               </a:rPr>
-              <a:t> — the artisan sees why a price was suggested and can override it.</a:t>
+              <a:t/>
             </a:r>
           </a:p>
           <a:p>
@@ -6827,7 +6827,7 @@
                 <a:latin typeface="Times New Roman" panose="02020603050405020304" pitchFamily="18" charset="0"/>
                 <a:cs typeface="Times New Roman" panose="02020603050405020304" pitchFamily="18" charset="0"/>
               </a:rPr>
-              <a:t>Built on India’s public digital rails</a:t>
+              <a:t>Runs without the internet or an API key — Whisper and NLLB-200 do the language work on-device/on-server.</a:t>
             </a:r>
             <a:r>
               <a:rPr lang="en-US" sz="1200" b="0" dirty="0">
@@ -6837,7 +6837,7 @@
                 <a:latin typeface="Times New Roman" panose="02020603050405020304" pitchFamily="18" charset="0"/>
                 <a:cs typeface="Times New Roman" panose="02020603050405020304" pitchFamily="18" charset="0"/>
               </a:rPr>
-              <a:t> — Bhashini for language, ONDC for reach, Bharat-TULIP for MoSJE linkage.</a:t>
+              <a:t/>
             </a:r>
           </a:p>
           <a:p>
@@ -7047,7 +7047,7 @@
                 <a:latin typeface="Times New Roman" panose="02020603050405020304" pitchFamily="18" charset="0"/>
                 <a:cs typeface="Times New Roman" panose="02020603050405020304" pitchFamily="18" charset="0"/>
               </a:rPr>
-              <a:t>Not another marketplace</a:t>
+              <a:t>Not another marketplace — an AI co-seller that does the photography, copywriting and pricing an artisan cannot, runs offline in nine languages, and hands the finished listing to the marketplaces that already exist.</a:t>
             </a:r>
             <a:r>
               <a:rPr lang="en-US" sz="1200" b="0" dirty="0">
@@ -7059,7 +7059,7 @@
                 <a:latin typeface="Times New Roman" panose="02020603050405020304" pitchFamily="18" charset="0"/>
                 <a:cs typeface="Times New Roman" panose="02020603050405020304" pitchFamily="18" charset="0"/>
               </a:rPr>
-              <a:t> — an AI co-seller that does the photography, copywriting and pricing an artisan cannot, then hands the finished listing to the marketplaces that already exist.</a:t>
+              <a:t/>
             </a:r>
           </a:p>
         </p:txBody>
@@ -7460,7 +7460,7 @@
                 <a:latin typeface="Times New Roman" panose="02020603050405020304" pitchFamily="18" charset="0"/>
                 <a:cs typeface="Times New Roman" panose="02020603050405020304" pitchFamily="18" charset="0"/>
               </a:rPr>
-              <a:t>Speech-to-Text</a:t>
+              <a:t>Speech-to-Text — faster-whisper (offline)</a:t>
             </a:r>
             <a:r>
               <a:rPr lang="en-US" sz="1200" b="0" dirty="0">
@@ -7470,7 +7470,7 @@
                 <a:latin typeface="Times New Roman" panose="02020603050405020304" pitchFamily="18" charset="0"/>
                 <a:cs typeface="Times New Roman" panose="02020603050405020304" pitchFamily="18" charset="0"/>
               </a:rPr>
-              <a:t> — Bhashini / Whisper</a:t>
+              <a:t/>
             </a:r>
           </a:p>
           <a:p>
@@ -7486,7 +7486,7 @@
                 <a:latin typeface="Times New Roman" panose="02020603050405020304" pitchFamily="18" charset="0"/>
                 <a:cs typeface="Times New Roman" panose="02020603050405020304" pitchFamily="18" charset="0"/>
               </a:rPr>
-              <a:t>LLM</a:t>
+              <a:t>NLLB-200 — 9-language listings</a:t>
             </a:r>
             <a:r>
               <a:rPr lang="en-US" sz="1200" b="0" dirty="0">
@@ -7496,7 +7496,7 @@
                 <a:latin typeface="Times New Roman" panose="02020603050405020304" pitchFamily="18" charset="0"/>
                 <a:cs typeface="Times New Roman" panose="02020603050405020304" pitchFamily="18" charset="0"/>
               </a:rPr>
-              <a:t> — multilingual listing</a:t>
+              <a:t/>
             </a:r>
           </a:p>
           <a:p>
@@ -7571,7 +7571,7 @@
                 <a:latin typeface="Times New Roman" panose="02020603050405020304" pitchFamily="18" charset="0"/>
                 <a:cs typeface="Times New Roman" panose="02020603050405020304" pitchFamily="18" charset="0"/>
               </a:rPr>
-              <a:t>React + TypeScript + Tailwind</a:t>
+              <a:t>React + Vite + Tailwind</a:t>
             </a:r>
           </a:p>
           <a:p>
@@ -7587,7 +7587,7 @@
                 <a:latin typeface="Times New Roman" panose="02020603050405020304" pitchFamily="18" charset="0"/>
                 <a:cs typeface="Times New Roman" panose="02020603050405020304" pitchFamily="18" charset="0"/>
               </a:rPr>
-              <a:t>Mobile-first PWA · Recharts</a:t>
+              <a:t>Installable PWA + Android APK (Capacitor)</a:t>
             </a:r>
           </a:p>
           <a:p>
@@ -7722,7 +7722,7 @@
                 <a:latin typeface="Times New Roman" panose="02020603050405020304" pitchFamily="18" charset="0"/>
                 <a:cs typeface="Times New Roman" panose="02020603050405020304" pitchFamily="18" charset="0"/>
               </a:rPr>
-              <a:t>ONDC Seller APIs · Bharat-TULIP</a:t>
+              <a:t>ONDC/GeM-ready catalogue fields</a:t>
             </a:r>
           </a:p>
           <a:p>
@@ -8107,7 +8107,7 @@
                 <a:latin typeface="Times New Roman" panose="02020603050405020304" pitchFamily="18" charset="0"/>
                 <a:cs typeface="Times New Roman" panose="02020603050405020304" pitchFamily="18" charset="0"/>
               </a:rPr>
-              <a:t>From craft to commerce</a:t>
+              <a:t>From craft to commerce — one offline AI pipeline turns a photo + a spoken sentence into a market-ready listing in 9 languages, prices it from the photo and the description, and opens it to bulk buyers.</a:t>
             </a:r>
             <a:r>
               <a:rPr lang="en-US" sz="1200" dirty="0" b="0">
@@ -8117,7 +8117,7 @@
                 <a:latin typeface="Times New Roman" panose="02020603050405020304" pitchFamily="18" charset="0"/>
                 <a:cs typeface="Times New Roman" panose="02020603050405020304" pitchFamily="18" charset="0"/>
               </a:rPr>
-              <a:t> — one AI pipeline turns a photo + a spoken sentence into a market-ready listing, prices it with evidence, and pushes it to ONDC and Bharat-TULIP.</a:t>
+              <a:t/>
             </a:r>
           </a:p>
         </p:txBody>
@@ -8630,7 +8630,7 @@
                 <a:latin typeface="Times New Roman" panose="02020603050405020304" pitchFamily="18" charset="0"/>
                 <a:cs typeface="Times New Roman" panose="02020603050405020304" pitchFamily="18" charset="0"/>
               </a:rPr>
-              <a:t> Computer Vision, Bhashini/Whisper ASR, LLMs and ML automate photo clean-up, listing and pricing.</a:t>
+              <a:t> Computer Vision, Whisper ASR, NLLB-200 translation and ML automate photo clean-up, listing and pricing.</a:t>
             </a:r>
           </a:p>
           <a:p>
@@ -8646,7 +8646,7 @@
                 <a:latin typeface="Times New Roman" panose="02020603050405020304" pitchFamily="18" charset="0"/>
                 <a:cs typeface="Times New Roman" panose="02020603050405020304" pitchFamily="18" charset="0"/>
               </a:rPr>
-              <a:t>Web + Mobile Architecture:</a:t>
+              <a:t>Web + Mobile Architecture: React + FastAPI, shipped as a signed Android APK and an offline-capable PWA — no specialised hardware.</a:t>
             </a:r>
             <a:r>
               <a:rPr lang="en-US" sz="1200" b="0" dirty="0">
@@ -8656,7 +8656,7 @@
                 <a:latin typeface="Times New Roman" panose="02020603050405020304" pitchFamily="18" charset="0"/>
                 <a:cs typeface="Times New Roman" panose="02020603050405020304" pitchFamily="18" charset="0"/>
               </a:rPr>
-              <a:t> React + FastAPI, shipped as an installable mobile-first PWA — no specialised hardware.</a:t>
+              <a:t/>
             </a:r>
           </a:p>
           <a:p>
@@ -8672,7 +8672,7 @@
                 <a:latin typeface="Times New Roman" panose="02020603050405020304" pitchFamily="18" charset="0"/>
                 <a:cs typeface="Times New Roman" panose="02020603050405020304" pitchFamily="18" charset="0"/>
               </a:rPr>
-              <a:t>Multilingual Interaction:</a:t>
+              <a:t>Multilingual Interaction: Voice input and full UI — including fonts — in 9 Indian languages; no typing, no English.</a:t>
             </a:r>
             <a:r>
               <a:rPr lang="en-US" sz="1200" b="0" dirty="0">
@@ -8682,7 +8682,7 @@
                 <a:latin typeface="Times New Roman" panose="02020603050405020304" pitchFamily="18" charset="0"/>
                 <a:cs typeface="Times New Roman" panose="02020603050405020304" pitchFamily="18" charset="0"/>
               </a:rPr>
-              <a:t> Local-language voice input removes typing and digital-literacy barriers.</a:t>
+              <a:t/>
             </a:r>
           </a:p>
           <a:p>
@@ -8892,7 +8892,7 @@
                 <a:latin typeface="Times New Roman" panose="02020603050405020304" pitchFamily="18" charset="0"/>
                 <a:cs typeface="Times New Roman" panose="02020603050405020304" pitchFamily="18" charset="0"/>
               </a:rPr>
-              <a:t>Low-cost deployment</a:t>
+              <a:t>Low-cost deployment → every model runs offline on our own server; no per-call API bill.</a:t>
             </a:r>
             <a:r>
               <a:rPr lang="en-US" sz="1200" b="0" dirty="0">
@@ -8902,7 +8902,7 @@
                 <a:latin typeface="Times New Roman" panose="02020603050405020304" pitchFamily="18" charset="0"/>
                 <a:cs typeface="Times New Roman" panose="02020603050405020304" pitchFamily="18" charset="0"/>
               </a:rPr>
-              <a:t> → open-source AI plus Bhashini’s free government APIs; no per-listing licensing.</a:t>
+              <a:t/>
             </a:r>
           </a:p>
           <a:p>
@@ -9289,7 +9289,7 @@
                 <a:latin typeface="Times New Roman" panose="02020603050405020304" pitchFamily="18" charset="0"/>
                 <a:cs typeface="Times New Roman" panose="02020603050405020304" pitchFamily="18" charset="0"/>
               </a:rPr>
-              <a:t>Voice Processing</a:t>
+              <a:t>Voice Processing → a fast Whisper pass with a large-v3 fallback when confidence drops.</a:t>
             </a:r>
             <a:r>
               <a:rPr lang="en-US" sz="1200" b="0" dirty="0">
@@ -9299,7 +9299,7 @@
                 <a:latin typeface="Times New Roman" panose="02020603050405020304" pitchFamily="18" charset="0"/>
                 <a:cs typeface="Times New Roman" panose="02020603050405020304" pitchFamily="18" charset="0"/>
               </a:rPr>
-              <a:t> → Bhashini + Whisper handle accent and dialect variation.</a:t>
+              <a:t/>
             </a:r>
           </a:p>
           <a:p>
@@ -9806,14 +9806,14 @@
                 <a:latin typeface="Times New Roman"/>
                 <a:cs typeface="Times New Roman"/>
               </a:rPr>
-              <a:t>Working prototype today</a:t>
+              <a:t>Working build today — photo → voice → 9-language listing → price → order → bulk quote, end to end, offline.</a:t>
             </a:r>
             <a:r>
               <a:rPr lang="en-US" sz="1100" dirty="0" b="0">
                 <a:latin typeface="Times New Roman"/>
                 <a:cs typeface="Times New Roman"/>
               </a:rPr>
-              <a:t> — photo → voice → listing → price → order, end to end.</a:t>
+              <a:t/>
             </a:r>
           </a:p>
           <a:p>
@@ -9826,14 +9826,14 @@
                 <a:latin typeface="Times New Roman"/>
                 <a:cs typeface="Times New Roman"/>
               </a:rPr>
-              <a:t>Phase 1 (0–3 months):</a:t>
+              <a:t>Phase 1 (built): Android APK + installable PWA, 9 languages, offline-capable.</a:t>
             </a:r>
             <a:r>
               <a:rPr lang="en-US" sz="1100" dirty="0" b="0">
                 <a:latin typeface="Times New Roman"/>
                 <a:cs typeface="Times New Roman"/>
               </a:rPr>
-              <a:t> Android/PWA pilot, one craft cluster, 3 languages.</a:t>
+              <a:t/>
             </a:r>
             <a:endParaRPr lang="en-US" sz="1200" dirty="0"/>
           </a:p>
@@ -9847,14 +9847,14 @@
                 <a:latin typeface="Times New Roman"/>
                 <a:cs typeface="Times New Roman"/>
               </a:rPr>
-              <a:t>Phase 2 (3–9 months):</a:t>
+              <a:t>Phase 2 (3–9 months): Bhashini APIs for the remaining scheduled languages; certified ONDC seller onboarding.</a:t>
             </a:r>
             <a:r>
               <a:rPr lang="en-US" sz="1100" dirty="0" b="0">
                 <a:latin typeface="Times New Roman"/>
                 <a:cs typeface="Times New Roman"/>
               </a:rPr>
-              <a:t> Bhashini’s 22 scheduled languages; ONDC + Bharat-TULIP live.</a:t>
+              <a:t/>
             </a:r>
             <a:endParaRPr lang="en-US" sz="1200" dirty="0"/>
           </a:p>
@@ -10567,7 +10567,7 @@
                 <a:latin typeface="Times New Roman" panose="02020603050405020304" pitchFamily="18" charset="0"/>
                 <a:cs typeface="Times New Roman" panose="02020603050405020304" pitchFamily="18" charset="0"/>
               </a:rPr>
-              <a:t>Language-Inclusive Commerce</a:t>
+              <a:t>Language-Inclusive CommerceVoice, screen and listings in 9 Indian languages today — Hindi, Bengali, Marathi, Telugu, Tamil, Gujarati, Kannada, Malayalam, English.</a:t>
             </a:r>
             <a:br>
               <a:rPr lang="en-US" sz="1400" b="1" dirty="0">
@@ -10586,7 +10586,7 @@
                 <a:latin typeface="Times New Roman" panose="02020603050405020304" pitchFamily="18" charset="0"/>
                 <a:cs typeface="Times New Roman" panose="02020603050405020304" pitchFamily="18" charset="0"/>
               </a:rPr>
-              <a:t>Voice in the artisan’s own language; Bhashini covers all 22 scheduled languages.</a:t>
+              <a:t/>
             </a:r>
           </a:p>
           <a:p>
@@ -11972,7 +11972,7 @@
                 </a:solidFill>
                 <a:latin typeface="Times New Roman"/>
               </a:rPr>
-              <a:t>ALIGNED WITH INDIA’S DIGITAL PUBLIC INFRASTRUCTURE</a:t>
+              <a:t>DESIGNED TO PLUG INTO INDIA’S DIGITAL PUBLIC INFRASTRUCTURE</a:t>
             </a:r>
           </a:p>
           <a:p>
@@ -11984,7 +11984,7 @@
                 </a:solidFill>
                 <a:latin typeface="Times New Roman"/>
               </a:rPr>
-              <a:t>Bhashini</a:t>
+              <a:t>Built to plug into ONDC — market reach · Bharat-TULIP (MoSJE) — artisan marketplace · GI Registry — craft authenticity · PM-DAKSH — artisan skilling · Bhashini — roadmap for the remaining scheduled languages</a:t>
             </a:r>
             <a:r>
               <a:rPr b="0" sz="1200">
@@ -11993,7 +11993,7 @@
                 </a:solidFill>
                 <a:latin typeface="Times New Roman"/>
               </a:rPr>
-              <a:t> — language access · </a:t>
+              <a:t/>
             </a:r>
             <a:r>
               <a:rPr b="1" sz="1200">
@@ -12002,7 +12002,7 @@
                 </a:solidFill>
                 <a:latin typeface="Times New Roman"/>
               </a:rPr>
-              <a:t>ONDC</a:t>
+              <a:t/>
             </a:r>
             <a:r>
               <a:rPr b="0" sz="1200">
@@ -12011,7 +12011,7 @@
                 </a:solidFill>
                 <a:latin typeface="Times New Roman"/>
               </a:rPr>
-              <a:t> — market reach · </a:t>
+              <a:t/>
             </a:r>
             <a:r>
               <a:rPr b="1" sz="1200">
@@ -12020,7 +12020,7 @@
                 </a:solidFill>
                 <a:latin typeface="Times New Roman"/>
               </a:rPr>
-              <a:t>Bharat-TULIP (MoSJE)</a:t>
+              <a:t/>
             </a:r>
             <a:r>
               <a:rPr b="0" sz="1200">
@@ -12029,7 +12029,7 @@
                 </a:solidFill>
                 <a:latin typeface="Times New Roman"/>
               </a:rPr>
-              <a:t> — artisan marketplace · </a:t>
+              <a:t/>
             </a:r>
             <a:r>
               <a:rPr b="1" sz="1200">
@@ -12038,7 +12038,7 @@
                 </a:solidFill>
                 <a:latin typeface="Times New Roman"/>
               </a:rPr>
-              <a:t>GI Registry</a:t>
+              <a:t/>
             </a:r>
             <a:r>
               <a:rPr b="0" sz="1200">
@@ -12047,7 +12047,7 @@
                 </a:solidFill>
                 <a:latin typeface="Times New Roman"/>
               </a:rPr>
-              <a:t> — craft authenticity · </a:t>
+              <a:t/>
             </a:r>
             <a:r>
               <a:rPr b="1" sz="1200">
@@ -12056,7 +12056,7 @@
                 </a:solidFill>
                 <a:latin typeface="Times New Roman"/>
               </a:rPr>
-              <a:t>PM-DAKSH</a:t>
+              <a:t/>
             </a:r>
             <a:r>
               <a:rPr b="0" sz="1200">
@@ -12065,7 +12065,7 @@
                 </a:solidFill>
                 <a:latin typeface="Times New Roman"/>
               </a:rPr>
-              <a:t> — artisan skilling</a:t>
+              <a:t/>
             </a:r>
           </a:p>
         </p:txBody>
